--- a/assets/figures-editable/appendix-studies/a-e20.pptx
+++ b/assets/figures-editable/appendix-studies/a-e20.pptx
@@ -7,7 +7,7 @@
   <p:sldIdLst>
     <p:sldId id="256" r:id="rId7"/>
   </p:sldIdLst>
-  <p:sldSz cx="8961120" cy="5870448" type="screen4x3"/>
+  <p:sldSz cx="12191695" cy="6858000" type="screen4x3"/>
   <p:notesSz cx="6858000" cy="9144000"/>
   <p:defaultTextStyle>
     <a:defPPr>
@@ -3098,14 +3098,14 @@
       <p:grpSpPr/>
       <p:sp>
         <p:nvSpPr>
-          <p:cNvPr id="2" name="text 0" descr="sci-ppt:obj-000"/>
+          <p:cNvPr id="2" name="A-E20 text 0" descr="sci-ppt:o000"/>
           <p:cNvSpPr txBox="1"/>
           <p:nvPr/>
         </p:nvSpPr>
         <p:spPr>
           <a:xfrm>
-            <a:off x="256032" y="137160"/>
-            <a:ext cx="7315200" cy="310896"/>
+            <a:off x="274320" y="118872"/>
+            <a:ext cx="11612880" cy="340105"/>
           </a:xfrm>
           <a:prstGeom prst="rect">
             <a:avLst/>
@@ -3114,7 +3114,7 @@
           <a:effectLst/>
         </p:spPr>
         <p:txBody>
-          <a:bodyPr wrap="none" lIns="0" rIns="0" tIns="0" bIns="0" anchor="ctr">
+          <a:bodyPr wrap="none" lIns="18288" rIns="18288" tIns="18288" bIns="18288" anchor="t">
             <a:spAutoFit/>
           </a:bodyPr>
           <a:lstStyle/>
@@ -3125,32 +3125,32 @@
               </a:spcAft>
             </a:pPr>
             <a:r>
-              <a:rPr sz="1439" b="0" i="0">
+              <a:rPr sz="1900" b="1" i="0">
                 <a:solidFill>
                   <a:srgbClr val="8EDBD4"/>
                 </a:solidFill>
                 <a:latin typeface="Arial"/>
               </a:rPr>
-              <a:t>A-E20 · Physical variable map</a:t>
+              <a:t>A-E20 · Darcy/storage approximation and derived diffusion</a:t>
             </a:r>
           </a:p>
         </p:txBody>
       </p:sp>
       <p:cxnSp>
         <p:nvCxnSpPr>
-          <p:cNvPr id="3" name="line 1" descr="sci-ppt:obj-001"/>
+          <p:cNvPr id="3" name="A-E20 line 1" descr="sci-ppt:o001"/>
           <p:cNvCxnSpPr/>
           <p:nvPr/>
         </p:nvCxnSpPr>
         <p:spPr>
           <a:xfrm>
-            <a:off x="960120" y="1024128"/>
-            <a:ext cx="0" cy="1408176"/>
+            <a:off x="914400" y="5029200"/>
+            <a:ext cx="5852160" cy="0"/>
           </a:xfrm>
           <a:prstGeom prst="line">
             <a:avLst/>
           </a:prstGeom>
-          <a:ln w="21590">
+          <a:ln w="19050">
             <a:solidFill>
               <a:srgbClr val="B4C7D2"/>
             </a:solidFill>
@@ -3160,19 +3160,19 @@
       </p:cxnSp>
       <p:cxnSp>
         <p:nvCxnSpPr>
-          <p:cNvPr id="4" name="line 2" descr="sci-ppt:obj-002"/>
+          <p:cNvPr id="4" name="A-E20 line 2" descr="sci-ppt:o002"/>
           <p:cNvCxnSpPr/>
           <p:nvPr/>
         </p:nvCxnSpPr>
         <p:spPr>
           <a:xfrm>
-            <a:off x="1371600" y="1024128"/>
-            <a:ext cx="0" cy="1408176"/>
+            <a:off x="914400" y="1371600"/>
+            <a:ext cx="0" cy="3657600"/>
           </a:xfrm>
           <a:prstGeom prst="line">
             <a:avLst/>
           </a:prstGeom>
-          <a:ln w="21590">
+          <a:ln w="19050">
             <a:solidFill>
               <a:srgbClr val="B4C7D2"/>
             </a:solidFill>
@@ -3182,19 +3182,19 @@
       </p:cxnSp>
       <p:cxnSp>
         <p:nvCxnSpPr>
-          <p:cNvPr id="5" name="line 3" descr="sci-ppt:obj-003"/>
+          <p:cNvPr id="5" name="A-E20 line 3" descr="sci-ppt:o003"/>
           <p:cNvCxnSpPr/>
           <p:nvPr/>
         </p:nvCxnSpPr>
         <p:spPr>
           <a:xfrm>
-            <a:off x="1783080" y="1024128"/>
-            <a:ext cx="0" cy="1408176"/>
+            <a:off x="914400" y="5029200"/>
+            <a:ext cx="0" cy="64008"/>
           </a:xfrm>
           <a:prstGeom prst="line">
             <a:avLst/>
           </a:prstGeom>
-          <a:ln w="21590">
+          <a:ln w="12700">
             <a:solidFill>
               <a:srgbClr val="B4C7D2"/>
             </a:solidFill>
@@ -3204,19 +3204,81 @@
       </p:cxnSp>
       <p:cxnSp>
         <p:nvCxnSpPr>
-          <p:cNvPr id="6" name="line 4" descr="sci-ppt:obj-004"/>
+          <p:cNvPr id="6" name="A-E20 line 4" descr="sci-ppt:o004"/>
           <p:cNvCxnSpPr/>
           <p:nvPr/>
         </p:nvCxnSpPr>
         <p:spPr>
           <a:xfrm>
-            <a:off x="2194560" y="1024128"/>
-            <a:ext cx="0" cy="1408176"/>
+            <a:off x="914400" y="1371600"/>
+            <a:ext cx="0" cy="3657600"/>
           </a:xfrm>
           <a:prstGeom prst="line">
             <a:avLst/>
           </a:prstGeom>
-          <a:ln w="21590">
+          <a:ln w="7620">
+            <a:solidFill>
+              <a:srgbClr val="2E4756"/>
+            </a:solidFill>
+          </a:ln>
+          <a:effectLst/>
+        </p:spPr>
+      </p:cxnSp>
+      <p:sp>
+        <p:nvSpPr>
+          <p:cNvPr id="7" name="A-E20 text 5" descr="sci-ppt:o005"/>
+          <p:cNvSpPr txBox="1"/>
+          <p:nvPr/>
+        </p:nvSpPr>
+        <p:spPr>
+          <a:xfrm>
+            <a:off x="457200" y="5111496"/>
+            <a:ext cx="914400" cy="208407"/>
+          </a:xfrm>
+          <a:prstGeom prst="rect">
+            <a:avLst/>
+          </a:prstGeom>
+          <a:noFill/>
+          <a:effectLst/>
+        </p:spPr>
+        <p:txBody>
+          <a:bodyPr wrap="none" lIns="18288" rIns="18288" tIns="18288" bIns="18288" anchor="t">
+            <a:spAutoFit/>
+          </a:bodyPr>
+          <a:lstStyle/>
+          <a:p>
+            <a:pPr algn="ctr">
+              <a:spcAft>
+                <a:spcPts val="0"/>
+              </a:spcAft>
+            </a:pPr>
+            <a:r>
+              <a:rPr sz="1050" b="0" i="0">
+                <a:solidFill>
+                  <a:srgbClr val="B4C7D2"/>
+                </a:solidFill>
+                <a:latin typeface="Arial"/>
+              </a:rPr>
+              <a:t>1e-06</a:t>
+            </a:r>
+          </a:p>
+        </p:txBody>
+      </p:sp>
+      <p:cxnSp>
+        <p:nvCxnSpPr>
+          <p:cNvPr id="8" name="A-E20 line 6" descr="sci-ppt:o006"/>
+          <p:cNvCxnSpPr/>
+          <p:nvPr/>
+        </p:nvCxnSpPr>
+        <p:spPr>
+          <a:xfrm>
+            <a:off x="2865120" y="5029200"/>
+            <a:ext cx="0" cy="64008"/>
+          </a:xfrm>
+          <a:prstGeom prst="line">
+            <a:avLst/>
+          </a:prstGeom>
+          <a:ln w="12700">
             <a:solidFill>
               <a:srgbClr val="B4C7D2"/>
             </a:solidFill>
@@ -3226,19 +3288,81 @@
       </p:cxnSp>
       <p:cxnSp>
         <p:nvCxnSpPr>
-          <p:cNvPr id="7" name="line 5" descr="sci-ppt:obj-005"/>
+          <p:cNvPr id="9" name="A-E20 line 7" descr="sci-ppt:o007"/>
           <p:cNvCxnSpPr/>
           <p:nvPr/>
         </p:nvCxnSpPr>
         <p:spPr>
           <a:xfrm>
-            <a:off x="2606040" y="1024128"/>
-            <a:ext cx="0" cy="1408176"/>
+            <a:off x="2865120" y="1371600"/>
+            <a:ext cx="0" cy="3657600"/>
           </a:xfrm>
           <a:prstGeom prst="line">
             <a:avLst/>
           </a:prstGeom>
-          <a:ln w="21590">
+          <a:ln w="7620">
+            <a:solidFill>
+              <a:srgbClr val="2E4756"/>
+            </a:solidFill>
+          </a:ln>
+          <a:effectLst/>
+        </p:spPr>
+      </p:cxnSp>
+      <p:sp>
+        <p:nvSpPr>
+          <p:cNvPr id="10" name="A-E20 text 8" descr="sci-ppt:o008"/>
+          <p:cNvSpPr txBox="1"/>
+          <p:nvPr/>
+        </p:nvSpPr>
+        <p:spPr>
+          <a:xfrm>
+            <a:off x="2407920" y="5111496"/>
+            <a:ext cx="914400" cy="208407"/>
+          </a:xfrm>
+          <a:prstGeom prst="rect">
+            <a:avLst/>
+          </a:prstGeom>
+          <a:noFill/>
+          <a:effectLst/>
+        </p:spPr>
+        <p:txBody>
+          <a:bodyPr wrap="none" lIns="18288" rIns="18288" tIns="18288" bIns="18288" anchor="t">
+            <a:spAutoFit/>
+          </a:bodyPr>
+          <a:lstStyle/>
+          <a:p>
+            <a:pPr algn="ctr">
+              <a:spcAft>
+                <a:spcPts val="0"/>
+              </a:spcAft>
+            </a:pPr>
+            <a:r>
+              <a:rPr sz="1050" b="0" i="0">
+                <a:solidFill>
+                  <a:srgbClr val="B4C7D2"/>
+                </a:solidFill>
+                <a:latin typeface="Arial"/>
+              </a:rPr>
+              <a:t>1e-05</a:t>
+            </a:r>
+          </a:p>
+        </p:txBody>
+      </p:sp>
+      <p:cxnSp>
+        <p:nvCxnSpPr>
+          <p:cNvPr id="11" name="A-E20 line 9" descr="sci-ppt:o009"/>
+          <p:cNvCxnSpPr/>
+          <p:nvPr/>
+        </p:nvCxnSpPr>
+        <p:spPr>
+          <a:xfrm>
+            <a:off x="4815840" y="5029200"/>
+            <a:ext cx="0" cy="64008"/>
+          </a:xfrm>
+          <a:prstGeom prst="line">
+            <a:avLst/>
+          </a:prstGeom>
+          <a:ln w="12700">
             <a:solidFill>
               <a:srgbClr val="B4C7D2"/>
             </a:solidFill>
@@ -3248,19 +3372,81 @@
       </p:cxnSp>
       <p:cxnSp>
         <p:nvCxnSpPr>
-          <p:cNvPr id="8" name="line 6" descr="sci-ppt:obj-006"/>
+          <p:cNvPr id="12" name="A-E20 line 10" descr="sci-ppt:o010"/>
           <p:cNvCxnSpPr/>
           <p:nvPr/>
         </p:nvCxnSpPr>
         <p:spPr>
           <a:xfrm>
-            <a:off x="3017520" y="1024128"/>
-            <a:ext cx="0" cy="1408176"/>
+            <a:off x="4815840" y="1371600"/>
+            <a:ext cx="0" cy="3657600"/>
           </a:xfrm>
           <a:prstGeom prst="line">
             <a:avLst/>
           </a:prstGeom>
-          <a:ln w="21590">
+          <a:ln w="7620">
+            <a:solidFill>
+              <a:srgbClr val="2E4756"/>
+            </a:solidFill>
+          </a:ln>
+          <a:effectLst/>
+        </p:spPr>
+      </p:cxnSp>
+      <p:sp>
+        <p:nvSpPr>
+          <p:cNvPr id="13" name="A-E20 text 11" descr="sci-ppt:o011"/>
+          <p:cNvSpPr txBox="1"/>
+          <p:nvPr/>
+        </p:nvSpPr>
+        <p:spPr>
+          <a:xfrm>
+            <a:off x="4358640" y="5111496"/>
+            <a:ext cx="914400" cy="208407"/>
+          </a:xfrm>
+          <a:prstGeom prst="rect">
+            <a:avLst/>
+          </a:prstGeom>
+          <a:noFill/>
+          <a:effectLst/>
+        </p:spPr>
+        <p:txBody>
+          <a:bodyPr wrap="none" lIns="18288" rIns="18288" tIns="18288" bIns="18288" anchor="t">
+            <a:spAutoFit/>
+          </a:bodyPr>
+          <a:lstStyle/>
+          <a:p>
+            <a:pPr algn="ctr">
+              <a:spcAft>
+                <a:spcPts val="0"/>
+              </a:spcAft>
+            </a:pPr>
+            <a:r>
+              <a:rPr sz="1050" b="0" i="0">
+                <a:solidFill>
+                  <a:srgbClr val="B4C7D2"/>
+                </a:solidFill>
+                <a:latin typeface="Arial"/>
+              </a:rPr>
+              <a:t>1e-04</a:t>
+            </a:r>
+          </a:p>
+        </p:txBody>
+      </p:sp>
+      <p:cxnSp>
+        <p:nvCxnSpPr>
+          <p:cNvPr id="14" name="A-E20 line 12" descr="sci-ppt:o012"/>
+          <p:cNvCxnSpPr/>
+          <p:nvPr/>
+        </p:nvCxnSpPr>
+        <p:spPr>
+          <a:xfrm>
+            <a:off x="6766560" y="5029200"/>
+            <a:ext cx="0" cy="64008"/>
+          </a:xfrm>
+          <a:prstGeom prst="line">
+            <a:avLst/>
+          </a:prstGeom>
+          <a:ln w="12700">
             <a:solidFill>
               <a:srgbClr val="B4C7D2"/>
             </a:solidFill>
@@ -3270,19 +3456,81 @@
       </p:cxnSp>
       <p:cxnSp>
         <p:nvCxnSpPr>
-          <p:cNvPr id="9" name="line 7" descr="sci-ppt:obj-007"/>
+          <p:cNvPr id="15" name="A-E20 line 13" descr="sci-ppt:o013"/>
           <p:cNvCxnSpPr/>
           <p:nvPr/>
         </p:nvCxnSpPr>
         <p:spPr>
           <a:xfrm>
-            <a:off x="3429000" y="1024128"/>
-            <a:ext cx="0" cy="1408176"/>
+            <a:off x="6766560" y="1371600"/>
+            <a:ext cx="0" cy="3657600"/>
           </a:xfrm>
           <a:prstGeom prst="line">
             <a:avLst/>
           </a:prstGeom>
-          <a:ln w="21590">
+          <a:ln w="7620">
+            <a:solidFill>
+              <a:srgbClr val="2E4756"/>
+            </a:solidFill>
+          </a:ln>
+          <a:effectLst/>
+        </p:spPr>
+      </p:cxnSp>
+      <p:sp>
+        <p:nvSpPr>
+          <p:cNvPr id="16" name="A-E20 text 14" descr="sci-ppt:o014"/>
+          <p:cNvSpPr txBox="1"/>
+          <p:nvPr/>
+        </p:nvSpPr>
+        <p:spPr>
+          <a:xfrm>
+            <a:off x="6309360" y="5111496"/>
+            <a:ext cx="914400" cy="208407"/>
+          </a:xfrm>
+          <a:prstGeom prst="rect">
+            <a:avLst/>
+          </a:prstGeom>
+          <a:noFill/>
+          <a:effectLst/>
+        </p:spPr>
+        <p:txBody>
+          <a:bodyPr wrap="none" lIns="18288" rIns="18288" tIns="18288" bIns="18288" anchor="t">
+            <a:spAutoFit/>
+          </a:bodyPr>
+          <a:lstStyle/>
+          <a:p>
+            <a:pPr algn="ctr">
+              <a:spcAft>
+                <a:spcPts val="0"/>
+              </a:spcAft>
+            </a:pPr>
+            <a:r>
+              <a:rPr sz="1050" b="0" i="0">
+                <a:solidFill>
+                  <a:srgbClr val="B4C7D2"/>
+                </a:solidFill>
+                <a:latin typeface="Arial"/>
+              </a:rPr>
+              <a:t>1e-03</a:t>
+            </a:r>
+          </a:p>
+        </p:txBody>
+      </p:sp>
+      <p:cxnSp>
+        <p:nvCxnSpPr>
+          <p:cNvPr id="17" name="A-E20 line 15" descr="sci-ppt:o015"/>
+          <p:cNvCxnSpPr/>
+          <p:nvPr/>
+        </p:nvCxnSpPr>
+        <p:spPr>
+          <a:xfrm>
+            <a:off x="850392" y="5029200"/>
+            <a:ext cx="64008" cy="0"/>
+          </a:xfrm>
+          <a:prstGeom prst="line">
+            <a:avLst/>
+          </a:prstGeom>
+          <a:ln w="12700">
             <a:solidFill>
               <a:srgbClr val="B4C7D2"/>
             </a:solidFill>
@@ -3292,19 +3540,19 @@
       </p:cxnSp>
       <p:cxnSp>
         <p:nvCxnSpPr>
-          <p:cNvPr id="10" name="line 8" descr="sci-ppt:obj-008"/>
+          <p:cNvPr id="18" name="A-E20 line 16" descr="sci-ppt:o016"/>
           <p:cNvCxnSpPr/>
           <p:nvPr/>
         </p:nvCxnSpPr>
         <p:spPr>
           <a:xfrm>
-            <a:off x="3840480" y="1024128"/>
-            <a:ext cx="0" cy="1408176"/>
+            <a:off x="850392" y="4114800"/>
+            <a:ext cx="64008" cy="0"/>
           </a:xfrm>
           <a:prstGeom prst="line">
             <a:avLst/>
           </a:prstGeom>
-          <a:ln w="21590">
+          <a:ln w="12700">
             <a:solidFill>
               <a:srgbClr val="B4C7D2"/>
             </a:solidFill>
@@ -3314,19 +3562,81 @@
       </p:cxnSp>
       <p:cxnSp>
         <p:nvCxnSpPr>
-          <p:cNvPr id="11" name="line 9" descr="sci-ppt:obj-009"/>
+          <p:cNvPr id="19" name="A-E20 line 17" descr="sci-ppt:o017"/>
           <p:cNvCxnSpPr/>
           <p:nvPr/>
         </p:nvCxnSpPr>
         <p:spPr>
           <a:xfrm>
-            <a:off x="4251960" y="1024128"/>
-            <a:ext cx="0" cy="1408176"/>
+            <a:off x="914400" y="4114800"/>
+            <a:ext cx="5852160" cy="0"/>
           </a:xfrm>
           <a:prstGeom prst="line">
             <a:avLst/>
           </a:prstGeom>
-          <a:ln w="21590">
+          <a:ln w="7620">
+            <a:solidFill>
+              <a:srgbClr val="2E4756"/>
+            </a:solidFill>
+          </a:ln>
+          <a:effectLst/>
+        </p:spPr>
+      </p:cxnSp>
+      <p:sp>
+        <p:nvSpPr>
+          <p:cNvPr id="20" name="A-E20 text 18" descr="sci-ppt:o018"/>
+          <p:cNvSpPr txBox="1"/>
+          <p:nvPr/>
+        </p:nvSpPr>
+        <p:spPr>
+          <a:xfrm>
+            <a:off x="45720" y="4032504"/>
+            <a:ext cx="777240" cy="208407"/>
+          </a:xfrm>
+          <a:prstGeom prst="rect">
+            <a:avLst/>
+          </a:prstGeom>
+          <a:noFill/>
+          <a:effectLst/>
+        </p:spPr>
+        <p:txBody>
+          <a:bodyPr wrap="none" lIns="18288" rIns="18288" tIns="18288" bIns="18288" anchor="t">
+            <a:spAutoFit/>
+          </a:bodyPr>
+          <a:lstStyle/>
+          <a:p>
+            <a:pPr algn="r">
+              <a:spcAft>
+                <a:spcPts val="0"/>
+              </a:spcAft>
+            </a:pPr>
+            <a:r>
+              <a:rPr sz="1050" b="0" i="0">
+                <a:solidFill>
+                  <a:srgbClr val="B4C7D2"/>
+                </a:solidFill>
+                <a:latin typeface="Arial"/>
+              </a:rPr>
+              <a:t>1e-06</a:t>
+            </a:r>
+          </a:p>
+        </p:txBody>
+      </p:sp>
+      <p:cxnSp>
+        <p:nvCxnSpPr>
+          <p:cNvPr id="21" name="A-E20 line 19" descr="sci-ppt:o019"/>
+          <p:cNvCxnSpPr/>
+          <p:nvPr/>
+        </p:nvCxnSpPr>
+        <p:spPr>
+          <a:xfrm>
+            <a:off x="850392" y="3200400"/>
+            <a:ext cx="64008" cy="0"/>
+          </a:xfrm>
+          <a:prstGeom prst="line">
+            <a:avLst/>
+          </a:prstGeom>
+          <a:ln w="12700">
             <a:solidFill>
               <a:srgbClr val="B4C7D2"/>
             </a:solidFill>
@@ -3336,19 +3646,81 @@
       </p:cxnSp>
       <p:cxnSp>
         <p:nvCxnSpPr>
-          <p:cNvPr id="12" name="line 10" descr="sci-ppt:obj-010"/>
+          <p:cNvPr id="22" name="A-E20 line 20" descr="sci-ppt:o020"/>
           <p:cNvCxnSpPr/>
           <p:nvPr/>
         </p:nvCxnSpPr>
         <p:spPr>
           <a:xfrm>
-            <a:off x="4663440" y="1024128"/>
-            <a:ext cx="0" cy="1408176"/>
+            <a:off x="914400" y="3200400"/>
+            <a:ext cx="5852160" cy="0"/>
           </a:xfrm>
           <a:prstGeom prst="line">
             <a:avLst/>
           </a:prstGeom>
-          <a:ln w="21590">
+          <a:ln w="7620">
+            <a:solidFill>
+              <a:srgbClr val="2E4756"/>
+            </a:solidFill>
+          </a:ln>
+          <a:effectLst/>
+        </p:spPr>
+      </p:cxnSp>
+      <p:sp>
+        <p:nvSpPr>
+          <p:cNvPr id="23" name="A-E20 text 21" descr="sci-ppt:o021"/>
+          <p:cNvSpPr txBox="1"/>
+          <p:nvPr/>
+        </p:nvSpPr>
+        <p:spPr>
+          <a:xfrm>
+            <a:off x="45720" y="3118104"/>
+            <a:ext cx="777240" cy="208407"/>
+          </a:xfrm>
+          <a:prstGeom prst="rect">
+            <a:avLst/>
+          </a:prstGeom>
+          <a:noFill/>
+          <a:effectLst/>
+        </p:spPr>
+        <p:txBody>
+          <a:bodyPr wrap="none" lIns="18288" rIns="18288" tIns="18288" bIns="18288" anchor="t">
+            <a:spAutoFit/>
+          </a:bodyPr>
+          <a:lstStyle/>
+          <a:p>
+            <a:pPr algn="r">
+              <a:spcAft>
+                <a:spcPts val="0"/>
+              </a:spcAft>
+            </a:pPr>
+            <a:r>
+              <a:rPr sz="1050" b="0" i="0">
+                <a:solidFill>
+                  <a:srgbClr val="B4C7D2"/>
+                </a:solidFill>
+                <a:latin typeface="Arial"/>
+              </a:rPr>
+              <a:t>1e-03</a:t>
+            </a:r>
+          </a:p>
+        </p:txBody>
+      </p:sp>
+      <p:cxnSp>
+        <p:nvCxnSpPr>
+          <p:cNvPr id="24" name="A-E20 line 22" descr="sci-ppt:o022"/>
+          <p:cNvCxnSpPr/>
+          <p:nvPr/>
+        </p:nvCxnSpPr>
+        <p:spPr>
+          <a:xfrm>
+            <a:off x="850392" y="2286000"/>
+            <a:ext cx="64008" cy="0"/>
+          </a:xfrm>
+          <a:prstGeom prst="line">
+            <a:avLst/>
+          </a:prstGeom>
+          <a:ln w="12700">
             <a:solidFill>
               <a:srgbClr val="B4C7D2"/>
             </a:solidFill>
@@ -3358,19 +3730,81 @@
       </p:cxnSp>
       <p:cxnSp>
         <p:nvCxnSpPr>
-          <p:cNvPr id="13" name="line 11" descr="sci-ppt:obj-011"/>
+          <p:cNvPr id="25" name="A-E20 line 23" descr="sci-ppt:o023"/>
           <p:cNvCxnSpPr/>
           <p:nvPr/>
         </p:nvCxnSpPr>
         <p:spPr>
           <a:xfrm>
-            <a:off x="5074920" y="1024128"/>
-            <a:ext cx="0" cy="1408176"/>
+            <a:off x="914400" y="2286000"/>
+            <a:ext cx="5852160" cy="0"/>
           </a:xfrm>
           <a:prstGeom prst="line">
             <a:avLst/>
           </a:prstGeom>
-          <a:ln w="21590">
+          <a:ln w="7620">
+            <a:solidFill>
+              <a:srgbClr val="2E4756"/>
+            </a:solidFill>
+          </a:ln>
+          <a:effectLst/>
+        </p:spPr>
+      </p:cxnSp>
+      <p:sp>
+        <p:nvSpPr>
+          <p:cNvPr id="26" name="A-E20 text 24" descr="sci-ppt:o024"/>
+          <p:cNvSpPr txBox="1"/>
+          <p:nvPr/>
+        </p:nvSpPr>
+        <p:spPr>
+          <a:xfrm>
+            <a:off x="45720" y="2203704"/>
+            <a:ext cx="777240" cy="208407"/>
+          </a:xfrm>
+          <a:prstGeom prst="rect">
+            <a:avLst/>
+          </a:prstGeom>
+          <a:noFill/>
+          <a:effectLst/>
+        </p:spPr>
+        <p:txBody>
+          <a:bodyPr wrap="none" lIns="18288" rIns="18288" tIns="18288" bIns="18288" anchor="t">
+            <a:spAutoFit/>
+          </a:bodyPr>
+          <a:lstStyle/>
+          <a:p>
+            <a:pPr algn="r">
+              <a:spcAft>
+                <a:spcPts val="0"/>
+              </a:spcAft>
+            </a:pPr>
+            <a:r>
+              <a:rPr sz="1050" b="0" i="0">
+                <a:solidFill>
+                  <a:srgbClr val="B4C7D2"/>
+                </a:solidFill>
+                <a:latin typeface="Arial"/>
+              </a:rPr>
+              <a:t>1e+00</a:t>
+            </a:r>
+          </a:p>
+        </p:txBody>
+      </p:sp>
+      <p:cxnSp>
+        <p:nvCxnSpPr>
+          <p:cNvPr id="27" name="A-E20 line 25" descr="sci-ppt:o025"/>
+          <p:cNvCxnSpPr/>
+          <p:nvPr/>
+        </p:nvCxnSpPr>
+        <p:spPr>
+          <a:xfrm>
+            <a:off x="850392" y="1371600"/>
+            <a:ext cx="64008" cy="0"/>
+          </a:xfrm>
+          <a:prstGeom prst="line">
+            <a:avLst/>
+          </a:prstGeom>
+          <a:ln w="12700">
             <a:solidFill>
               <a:srgbClr val="B4C7D2"/>
             </a:solidFill>
@@ -3380,218 +3814,36 @@
       </p:cxnSp>
       <p:cxnSp>
         <p:nvCxnSpPr>
-          <p:cNvPr id="14" name="line 12" descr="sci-ppt:obj-012"/>
+          <p:cNvPr id="28" name="A-E20 line 26" descr="sci-ppt:o026"/>
           <p:cNvCxnSpPr/>
           <p:nvPr/>
         </p:nvCxnSpPr>
         <p:spPr>
           <a:xfrm>
-            <a:off x="5486400" y="1024128"/>
-            <a:ext cx="0" cy="1408176"/>
+            <a:off x="914400" y="1371600"/>
+            <a:ext cx="5852160" cy="0"/>
           </a:xfrm>
           <a:prstGeom prst="line">
             <a:avLst/>
           </a:prstGeom>
-          <a:ln w="21590">
+          <a:ln w="7620">
             <a:solidFill>
-              <a:srgbClr val="B4C7D2"/>
+              <a:srgbClr val="2E4756"/>
             </a:solidFill>
           </a:ln>
           <a:effectLst/>
         </p:spPr>
       </p:cxnSp>
-      <p:cxnSp>
-        <p:nvCxnSpPr>
-          <p:cNvPr id="15" name="line 13" descr="sci-ppt:obj-013"/>
-          <p:cNvCxnSpPr/>
-          <p:nvPr/>
-        </p:nvCxnSpPr>
-        <p:spPr>
-          <a:xfrm>
-            <a:off x="877824" y="1060704"/>
-            <a:ext cx="4809744" cy="0"/>
-          </a:xfrm>
-          <a:prstGeom prst="line">
-            <a:avLst/>
-          </a:prstGeom>
-          <a:ln w="21590">
-            <a:solidFill>
-              <a:srgbClr val="B4C7D2"/>
-            </a:solidFill>
-          </a:ln>
-          <a:effectLst/>
-        </p:spPr>
-      </p:cxnSp>
-      <p:cxnSp>
-        <p:nvCxnSpPr>
-          <p:cNvPr id="16" name="line 14" descr="sci-ppt:obj-014"/>
-          <p:cNvCxnSpPr/>
-          <p:nvPr/>
-        </p:nvCxnSpPr>
-        <p:spPr>
-          <a:xfrm>
-            <a:off x="877824" y="1408176"/>
-            <a:ext cx="4809744" cy="0"/>
-          </a:xfrm>
-          <a:prstGeom prst="line">
-            <a:avLst/>
-          </a:prstGeom>
-          <a:ln w="21590">
-            <a:solidFill>
-              <a:srgbClr val="B4C7D2"/>
-            </a:solidFill>
-          </a:ln>
-          <a:effectLst/>
-        </p:spPr>
-      </p:cxnSp>
-      <p:cxnSp>
-        <p:nvCxnSpPr>
-          <p:cNvPr id="17" name="line 15" descr="sci-ppt:obj-015"/>
-          <p:cNvCxnSpPr/>
-          <p:nvPr/>
-        </p:nvCxnSpPr>
-        <p:spPr>
-          <a:xfrm>
-            <a:off x="877824" y="1755648"/>
-            <a:ext cx="4809744" cy="0"/>
-          </a:xfrm>
-          <a:prstGeom prst="line">
-            <a:avLst/>
-          </a:prstGeom>
-          <a:ln w="21590">
-            <a:solidFill>
-              <a:srgbClr val="B4C7D2"/>
-            </a:solidFill>
-          </a:ln>
-          <a:effectLst/>
-        </p:spPr>
-      </p:cxnSp>
-      <p:cxnSp>
-        <p:nvCxnSpPr>
-          <p:cNvPr id="18" name="line 16" descr="sci-ppt:obj-016"/>
-          <p:cNvCxnSpPr/>
-          <p:nvPr/>
-        </p:nvCxnSpPr>
-        <p:spPr>
-          <a:xfrm>
-            <a:off x="877824" y="2103120"/>
-            <a:ext cx="4809744" cy="0"/>
-          </a:xfrm>
-          <a:prstGeom prst="line">
-            <a:avLst/>
-          </a:prstGeom>
-          <a:ln w="21590">
-            <a:solidFill>
-              <a:srgbClr val="B4C7D2"/>
-            </a:solidFill>
-          </a:ln>
-          <a:effectLst/>
-        </p:spPr>
-      </p:cxnSp>
-      <p:cxnSp>
-        <p:nvCxnSpPr>
-          <p:cNvPr id="19" name="line 17" descr="sci-ppt:obj-017"/>
-          <p:cNvCxnSpPr/>
-          <p:nvPr/>
-        </p:nvCxnSpPr>
-        <p:spPr>
-          <a:xfrm>
-            <a:off x="877824" y="2450592"/>
-            <a:ext cx="4809744" cy="0"/>
-          </a:xfrm>
-          <a:prstGeom prst="line">
-            <a:avLst/>
-          </a:prstGeom>
-          <a:ln w="21590">
-            <a:solidFill>
-              <a:srgbClr val="B4C7D2"/>
-            </a:solidFill>
-          </a:ln>
-          <a:effectLst/>
-        </p:spPr>
-      </p:cxnSp>
-      <p:cxnSp>
-        <p:nvCxnSpPr>
-          <p:cNvPr id="20" name="arrow 18" descr="sci-ppt:obj-018"/>
-          <p:cNvCxnSpPr/>
-          <p:nvPr/>
-        </p:nvCxnSpPr>
-        <p:spPr>
-          <a:xfrm>
-            <a:off x="1078992" y="1280160"/>
-            <a:ext cx="5413248" cy="0"/>
-          </a:xfrm>
-          <a:prstGeom prst="line">
-            <a:avLst/>
-          </a:prstGeom>
-          <a:ln w="21590">
-            <a:solidFill>
-              <a:srgbClr val="8EDBD4"/>
-            </a:solidFill>
-            <a:headEnd type="none" w="med" len="med"/>
-            <a:tailEnd type="triangle" w="med" len="med"/>
-          </a:ln>
-          <a:effectLst/>
-        </p:spPr>
-      </p:cxnSp>
-      <p:cxnSp>
-        <p:nvCxnSpPr>
-          <p:cNvPr id="21" name="arrow 19" descr="sci-ppt:obj-019"/>
-          <p:cNvCxnSpPr/>
-          <p:nvPr/>
-        </p:nvCxnSpPr>
-        <p:spPr>
-          <a:xfrm>
-            <a:off x="1078992" y="1764792"/>
-            <a:ext cx="5413248" cy="0"/>
-          </a:xfrm>
-          <a:prstGeom prst="line">
-            <a:avLst/>
-          </a:prstGeom>
-          <a:ln w="21590">
-            <a:solidFill>
-              <a:srgbClr val="8EDBD4"/>
-            </a:solidFill>
-            <a:headEnd type="none" w="med" len="med"/>
-            <a:tailEnd type="triangle" w="med" len="med"/>
-          </a:ln>
-          <a:effectLst/>
-        </p:spPr>
-      </p:cxnSp>
-      <p:cxnSp>
-        <p:nvCxnSpPr>
-          <p:cNvPr id="22" name="arrow 20" descr="sci-ppt:obj-020"/>
-          <p:cNvCxnSpPr/>
-          <p:nvPr/>
-        </p:nvCxnSpPr>
-        <p:spPr>
-          <a:xfrm>
-            <a:off x="1078992" y="2231136"/>
-            <a:ext cx="5413248" cy="0"/>
-          </a:xfrm>
-          <a:prstGeom prst="line">
-            <a:avLst/>
-          </a:prstGeom>
-          <a:ln w="21590">
-            <a:solidFill>
-              <a:srgbClr val="8EDBD4"/>
-            </a:solidFill>
-            <a:headEnd type="none" w="med" len="med"/>
-            <a:tailEnd type="triangle" w="med" len="med"/>
-          </a:ln>
-          <a:effectLst/>
-        </p:spPr>
-      </p:cxnSp>
-      <p:sp>
-        <p:nvSpPr>
-          <p:cNvPr id="23" name="text 21" descr="sci-ppt:obj-021"/>
+      <p:sp>
+        <p:nvSpPr>
+          <p:cNvPr id="29" name="A-E20 text 27" descr="sci-ppt:o027"/>
           <p:cNvSpPr txBox="1"/>
           <p:nvPr/>
         </p:nvSpPr>
         <p:spPr>
           <a:xfrm>
-            <a:off x="960120" y="612648"/>
-            <a:ext cx="7406640" cy="310896"/>
+            <a:off x="45720" y="1289304"/>
+            <a:ext cx="777240" cy="208407"/>
           </a:xfrm>
           <a:prstGeom prst="rect">
             <a:avLst/>
@@ -3600,7 +3852,87 @@
           <a:effectLst/>
         </p:spPr>
         <p:txBody>
-          <a:bodyPr wrap="none" lIns="0" rIns="0" tIns="0" bIns="0" anchor="ctr">
+          <a:bodyPr wrap="none" lIns="18288" rIns="18288" tIns="18288" bIns="18288" anchor="t">
+            <a:spAutoFit/>
+          </a:bodyPr>
+          <a:lstStyle/>
+          <a:p>
+            <a:pPr algn="r">
+              <a:spcAft>
+                <a:spcPts val="0"/>
+              </a:spcAft>
+            </a:pPr>
+            <a:r>
+              <a:rPr sz="1050" b="0" i="0">
+                <a:solidFill>
+                  <a:srgbClr val="B4C7D2"/>
+                </a:solidFill>
+                <a:latin typeface="Arial"/>
+              </a:rPr>
+              <a:t>1e+03</a:t>
+            </a:r>
+          </a:p>
+        </p:txBody>
+      </p:sp>
+      <p:sp>
+        <p:nvSpPr>
+          <p:cNvPr id="30" name="A-E20 text 28" descr="sci-ppt:o028"/>
+          <p:cNvSpPr txBox="1"/>
+          <p:nvPr/>
+        </p:nvSpPr>
+        <p:spPr>
+          <a:xfrm>
+            <a:off x="914400" y="5312664"/>
+            <a:ext cx="5852160" cy="231648"/>
+          </a:xfrm>
+          <a:prstGeom prst="rect">
+            <a:avLst/>
+          </a:prstGeom>
+          <a:noFill/>
+          <a:effectLst/>
+        </p:spPr>
+        <p:txBody>
+          <a:bodyPr wrap="none" lIns="18288" rIns="18288" tIns="18288" bIns="18288" anchor="t">
+            <a:spAutoFit/>
+          </a:bodyPr>
+          <a:lstStyle/>
+          <a:p>
+            <a:pPr algn="ctr">
+              <a:spcAft>
+                <a:spcPts val="0"/>
+              </a:spcAft>
+            </a:pPr>
+            <a:r>
+              <a:rPr sz="1200" b="0" i="0">
+                <a:solidFill>
+                  <a:srgbClr val="E7F0F3"/>
+                </a:solidFill>
+                <a:latin typeface="Arial"/>
+              </a:rPr>
+              <a:t>drainage length L_g  (m)</a:t>
+            </a:r>
+          </a:p>
+        </p:txBody>
+      </p:sp>
+      <p:sp>
+        <p:nvSpPr>
+          <p:cNvPr id="31" name="A-E20 text 29" descr="sci-ppt:o029"/>
+          <p:cNvSpPr txBox="1"/>
+          <p:nvPr/>
+        </p:nvSpPr>
+        <p:spPr>
+          <a:xfrm>
+            <a:off x="365760" y="1024128"/>
+            <a:ext cx="5852160" cy="231648"/>
+          </a:xfrm>
+          <a:prstGeom prst="rect">
+            <a:avLst/>
+          </a:prstGeom>
+          <a:noFill/>
+          <a:effectLst/>
+        </p:spPr>
+        <p:txBody>
+          <a:bodyPr wrap="none" lIns="18288" rIns="18288" tIns="18288" bIns="18288" anchor="t">
             <a:spAutoFit/>
           </a:bodyPr>
           <a:lstStyle/>
@@ -3611,27 +3943,385 @@
               </a:spcAft>
             </a:pPr>
             <a:r>
-              <a:rPr sz="1296" b="0" i="0">
+              <a:rPr sz="1200" b="0" i="0">
                 <a:solidFill>
                   <a:srgbClr val="E7F0F3"/>
                 </a:solidFill>
                 <a:latin typeface="Arial"/>
               </a:rPr>
-              <a:t>Solvent flow relative to an intact network</a:t>
-            </a:r>
-          </a:p>
-        </p:txBody>
-      </p:sp>
-      <p:sp>
-        <p:nvSpPr>
-          <p:cNvPr id="24" name="text 22" descr="sci-ppt:obj-022"/>
+              <a:t>tₚₒᵣₒ  (s)</a:t>
+            </a:r>
+          </a:p>
+        </p:txBody>
+      </p:sp>
+      <p:sp>
+        <p:nvSpPr>
+          <p:cNvPr id="32" name="A-E20 polygon 30" descr="sci-ppt:o030"/>
+          <p:cNvSpPr/>
+          <p:nvPr/>
+        </p:nvSpPr>
+        <p:spPr>
+          <a:xfrm>
+            <a:off x="914400" y="1377871"/>
+            <a:ext cx="5615709" cy="1754909"/>
+          </a:xfrm>
+          <a:custGeom>
+            <a:avLst/>
+            <a:gdLst/>
+            <a:ahLst/>
+            <a:cxnLst/>
+            <a:rect l="l" t="t" r="r" b="b"/>
+            <a:pathLst>
+              <a:path w="5615709" h="1754909">
+                <a:moveTo>
+                  <a:pt x="0" y="1754909"/>
+                </a:moveTo>
+                <a:lnTo>
+                  <a:pt x="59112" y="1736436"/>
+                </a:lnTo>
+                <a:lnTo>
+                  <a:pt x="118225" y="1717964"/>
+                </a:lnTo>
+                <a:lnTo>
+                  <a:pt x="177338" y="1699491"/>
+                </a:lnTo>
+                <a:lnTo>
+                  <a:pt x="236450" y="1681018"/>
+                </a:lnTo>
+                <a:lnTo>
+                  <a:pt x="295563" y="1662545"/>
+                </a:lnTo>
+                <a:lnTo>
+                  <a:pt x="354676" y="1644073"/>
+                </a:lnTo>
+                <a:lnTo>
+                  <a:pt x="413789" y="1625600"/>
+                </a:lnTo>
+                <a:lnTo>
+                  <a:pt x="472901" y="1607127"/>
+                </a:lnTo>
+                <a:lnTo>
+                  <a:pt x="532014" y="1588654"/>
+                </a:lnTo>
+                <a:lnTo>
+                  <a:pt x="591127" y="1570182"/>
+                </a:lnTo>
+                <a:lnTo>
+                  <a:pt x="650239" y="1551709"/>
+                </a:lnTo>
+                <a:lnTo>
+                  <a:pt x="709352" y="1533236"/>
+                </a:lnTo>
+                <a:lnTo>
+                  <a:pt x="768465" y="1514764"/>
+                </a:lnTo>
+                <a:lnTo>
+                  <a:pt x="827578" y="1496291"/>
+                </a:lnTo>
+                <a:lnTo>
+                  <a:pt x="886690" y="1477818"/>
+                </a:lnTo>
+                <a:lnTo>
+                  <a:pt x="945803" y="1459345"/>
+                </a:lnTo>
+                <a:lnTo>
+                  <a:pt x="1004916" y="1440873"/>
+                </a:lnTo>
+                <a:lnTo>
+                  <a:pt x="1064029" y="1422400"/>
+                </a:lnTo>
+                <a:lnTo>
+                  <a:pt x="1123141" y="1403927"/>
+                </a:lnTo>
+                <a:lnTo>
+                  <a:pt x="1182254" y="1385454"/>
+                </a:lnTo>
+                <a:lnTo>
+                  <a:pt x="1241367" y="1366982"/>
+                </a:lnTo>
+                <a:lnTo>
+                  <a:pt x="1300480" y="1348509"/>
+                </a:lnTo>
+                <a:lnTo>
+                  <a:pt x="1359592" y="1330036"/>
+                </a:lnTo>
+                <a:lnTo>
+                  <a:pt x="1418705" y="1311564"/>
+                </a:lnTo>
+                <a:lnTo>
+                  <a:pt x="1477818" y="1293091"/>
+                </a:lnTo>
+                <a:lnTo>
+                  <a:pt x="1536930" y="1274618"/>
+                </a:lnTo>
+                <a:lnTo>
+                  <a:pt x="1596043" y="1256145"/>
+                </a:lnTo>
+                <a:lnTo>
+                  <a:pt x="1655156" y="1237673"/>
+                </a:lnTo>
+                <a:lnTo>
+                  <a:pt x="1714269" y="1219200"/>
+                </a:lnTo>
+                <a:lnTo>
+                  <a:pt x="1773381" y="1200727"/>
+                </a:lnTo>
+                <a:lnTo>
+                  <a:pt x="1832494" y="1182254"/>
+                </a:lnTo>
+                <a:lnTo>
+                  <a:pt x="1891607" y="1163782"/>
+                </a:lnTo>
+                <a:lnTo>
+                  <a:pt x="1950720" y="1145309"/>
+                </a:lnTo>
+                <a:lnTo>
+                  <a:pt x="2009832" y="1126836"/>
+                </a:lnTo>
+                <a:lnTo>
+                  <a:pt x="2068945" y="1108364"/>
+                </a:lnTo>
+                <a:lnTo>
+                  <a:pt x="2128058" y="1089891"/>
+                </a:lnTo>
+                <a:lnTo>
+                  <a:pt x="2187170" y="1071418"/>
+                </a:lnTo>
+                <a:lnTo>
+                  <a:pt x="2246283" y="1052945"/>
+                </a:lnTo>
+                <a:lnTo>
+                  <a:pt x="2305396" y="1034473"/>
+                </a:lnTo>
+                <a:lnTo>
+                  <a:pt x="2364509" y="1016000"/>
+                </a:lnTo>
+                <a:lnTo>
+                  <a:pt x="2423621" y="997527"/>
+                </a:lnTo>
+                <a:lnTo>
+                  <a:pt x="2482734" y="979054"/>
+                </a:lnTo>
+                <a:lnTo>
+                  <a:pt x="2541847" y="960582"/>
+                </a:lnTo>
+                <a:lnTo>
+                  <a:pt x="2600960" y="942109"/>
+                </a:lnTo>
+                <a:lnTo>
+                  <a:pt x="2660072" y="923636"/>
+                </a:lnTo>
+                <a:lnTo>
+                  <a:pt x="2719185" y="905164"/>
+                </a:lnTo>
+                <a:lnTo>
+                  <a:pt x="2778298" y="886691"/>
+                </a:lnTo>
+                <a:lnTo>
+                  <a:pt x="2837410" y="868218"/>
+                </a:lnTo>
+                <a:lnTo>
+                  <a:pt x="2896523" y="849745"/>
+                </a:lnTo>
+                <a:lnTo>
+                  <a:pt x="2955636" y="831273"/>
+                </a:lnTo>
+                <a:lnTo>
+                  <a:pt x="3014749" y="812800"/>
+                </a:lnTo>
+                <a:lnTo>
+                  <a:pt x="3073861" y="794327"/>
+                </a:lnTo>
+                <a:lnTo>
+                  <a:pt x="3132974" y="775854"/>
+                </a:lnTo>
+                <a:lnTo>
+                  <a:pt x="3192087" y="757382"/>
+                </a:lnTo>
+                <a:lnTo>
+                  <a:pt x="3251200" y="738909"/>
+                </a:lnTo>
+                <a:lnTo>
+                  <a:pt x="3310312" y="720436"/>
+                </a:lnTo>
+                <a:lnTo>
+                  <a:pt x="3369425" y="701964"/>
+                </a:lnTo>
+                <a:lnTo>
+                  <a:pt x="3428538" y="683491"/>
+                </a:lnTo>
+                <a:lnTo>
+                  <a:pt x="3487650" y="665018"/>
+                </a:lnTo>
+                <a:lnTo>
+                  <a:pt x="3546763" y="646545"/>
+                </a:lnTo>
+                <a:lnTo>
+                  <a:pt x="3605876" y="628073"/>
+                </a:lnTo>
+                <a:lnTo>
+                  <a:pt x="3664989" y="609600"/>
+                </a:lnTo>
+                <a:lnTo>
+                  <a:pt x="3724101" y="591127"/>
+                </a:lnTo>
+                <a:lnTo>
+                  <a:pt x="3783214" y="572654"/>
+                </a:lnTo>
+                <a:lnTo>
+                  <a:pt x="3842327" y="554182"/>
+                </a:lnTo>
+                <a:lnTo>
+                  <a:pt x="3901440" y="535709"/>
+                </a:lnTo>
+                <a:lnTo>
+                  <a:pt x="3960552" y="517236"/>
+                </a:lnTo>
+                <a:lnTo>
+                  <a:pt x="4019665" y="498764"/>
+                </a:lnTo>
+                <a:lnTo>
+                  <a:pt x="4078778" y="480291"/>
+                </a:lnTo>
+                <a:lnTo>
+                  <a:pt x="4137890" y="461818"/>
+                </a:lnTo>
+                <a:lnTo>
+                  <a:pt x="4197003" y="443345"/>
+                </a:lnTo>
+                <a:lnTo>
+                  <a:pt x="4256116" y="424873"/>
+                </a:lnTo>
+                <a:lnTo>
+                  <a:pt x="4315229" y="406400"/>
+                </a:lnTo>
+                <a:lnTo>
+                  <a:pt x="4374341" y="387927"/>
+                </a:lnTo>
+                <a:lnTo>
+                  <a:pt x="4433454" y="369454"/>
+                </a:lnTo>
+                <a:lnTo>
+                  <a:pt x="4492567" y="350982"/>
+                </a:lnTo>
+                <a:lnTo>
+                  <a:pt x="4551680" y="332509"/>
+                </a:lnTo>
+                <a:lnTo>
+                  <a:pt x="4610792" y="314036"/>
+                </a:lnTo>
+                <a:lnTo>
+                  <a:pt x="4669905" y="295564"/>
+                </a:lnTo>
+                <a:lnTo>
+                  <a:pt x="4729018" y="277091"/>
+                </a:lnTo>
+                <a:lnTo>
+                  <a:pt x="4788130" y="258618"/>
+                </a:lnTo>
+                <a:lnTo>
+                  <a:pt x="4847243" y="240145"/>
+                </a:lnTo>
+                <a:lnTo>
+                  <a:pt x="4906356" y="221673"/>
+                </a:lnTo>
+                <a:lnTo>
+                  <a:pt x="4965469" y="203200"/>
+                </a:lnTo>
+                <a:lnTo>
+                  <a:pt x="5024581" y="184727"/>
+                </a:lnTo>
+                <a:lnTo>
+                  <a:pt x="5083694" y="166254"/>
+                </a:lnTo>
+                <a:lnTo>
+                  <a:pt x="5142807" y="147782"/>
+                </a:lnTo>
+                <a:lnTo>
+                  <a:pt x="5201920" y="129309"/>
+                </a:lnTo>
+                <a:lnTo>
+                  <a:pt x="5261032" y="110836"/>
+                </a:lnTo>
+                <a:lnTo>
+                  <a:pt x="5320145" y="92364"/>
+                </a:lnTo>
+                <a:lnTo>
+                  <a:pt x="5379258" y="73891"/>
+                </a:lnTo>
+                <a:lnTo>
+                  <a:pt x="5438370" y="55418"/>
+                </a:lnTo>
+                <a:lnTo>
+                  <a:pt x="5497483" y="36945"/>
+                </a:lnTo>
+                <a:lnTo>
+                  <a:pt x="5556596" y="18473"/>
+                </a:lnTo>
+                <a:lnTo>
+                  <a:pt x="5615709" y="0"/>
+                </a:lnTo>
+              </a:path>
+            </a:pathLst>
+          </a:custGeom>
+          <a:noFill/>
+          <a:ln w="43180">
+            <a:solidFill>
+              <a:srgbClr val="8EDBD4"/>
+            </a:solidFill>
+          </a:ln>
+          <a:effectLst/>
+        </p:spPr>
+        <p:txBody>
+          <a:bodyPr rtlCol="0" anchor="ctr"/>
+          <a:lstStyle/>
+          <a:p>
+            <a:pPr algn="ctr"/>
+          </a:p>
+        </p:txBody>
+      </p:sp>
+      <p:sp>
+        <p:nvSpPr>
+          <p:cNvPr id="33" name="A-E20 ellipse 31" descr="sci-ppt:o031"/>
+          <p:cNvSpPr/>
+          <p:nvPr/>
+        </p:nvSpPr>
+        <p:spPr>
+          <a:xfrm>
+            <a:off x="3722697" y="2159175"/>
+            <a:ext cx="146304" cy="146304"/>
+          </a:xfrm>
+          <a:prstGeom prst="ellipse">
+            <a:avLst/>
+          </a:prstGeom>
+          <a:solidFill>
+            <a:srgbClr val="F2B880"/>
+          </a:solidFill>
+          <a:ln w="12700">
+            <a:solidFill>
+              <a:srgbClr val="F2B880"/>
+            </a:solidFill>
+          </a:ln>
+          <a:effectLst/>
+        </p:spPr>
+        <p:txBody>
+          <a:bodyPr rtlCol="0" anchor="ctr"/>
+          <a:lstStyle/>
+          <a:p>
+            <a:pPr algn="ctr"/>
+          </a:p>
+        </p:txBody>
+      </p:sp>
+      <p:sp>
+        <p:nvSpPr>
+          <p:cNvPr id="34" name="A-E20 text 32" descr="sci-ppt:o032"/>
           <p:cNvSpPr txBox="1"/>
           <p:nvPr/>
         </p:nvSpPr>
         <p:spPr>
           <a:xfrm>
-            <a:off x="6720840" y="1453896"/>
-            <a:ext cx="1554480" cy="310896"/>
+            <a:off x="3933009" y="2598087"/>
+            <a:ext cx="2560320" cy="231648"/>
           </a:xfrm>
           <a:prstGeom prst="rect">
             <a:avLst/>
@@ -3640,7 +4330,7 @@
           <a:effectLst/>
         </p:spPr>
         <p:txBody>
-          <a:bodyPr wrap="none" lIns="0" rIns="0" tIns="0" bIns="0" anchor="ctr">
+          <a:bodyPr wrap="none" lIns="18288" rIns="18288" tIns="18288" bIns="18288" anchor="t">
             <a:spAutoFit/>
           </a:bodyPr>
           <a:lstStyle/>
@@ -3651,51 +4341,242 @@
               </a:spcAft>
             </a:pPr>
             <a:r>
-              <a:rPr sz="1296" b="0" i="0">
+              <a:rPr sz="1200" b="0" i="0">
+                <a:solidFill>
+                  <a:srgbClr val="F2B880"/>
+                </a:solidFill>
+                <a:latin typeface="Arial"/>
+              </a:rPr>
+              <a:t>tₚₒᵣₒ = 1.5 s at 30 µm</a:t>
+            </a:r>
+          </a:p>
+        </p:txBody>
+      </p:sp>
+      <p:cxnSp>
+        <p:nvCxnSpPr>
+          <p:cNvPr id="35" name="A-E20 line 33" descr="sci-ppt:o033"/>
+          <p:cNvCxnSpPr/>
+          <p:nvPr/>
+        </p:nvCxnSpPr>
+        <p:spPr>
+          <a:xfrm>
+            <a:off x="914400" y="3969373"/>
+            <a:ext cx="5852160" cy="0"/>
+          </a:xfrm>
+          <a:prstGeom prst="line">
+            <a:avLst/>
+          </a:prstGeom>
+          <a:ln w="16510">
+            <a:solidFill>
+              <a:srgbClr val="F28BA0"/>
+            </a:solidFill>
+            <a:prstDash val="dash"/>
+          </a:ln>
+          <a:effectLst/>
+        </p:spPr>
+      </p:cxnSp>
+      <p:sp>
+        <p:nvSpPr>
+          <p:cNvPr id="36" name="A-E20 text 34" descr="sci-ppt:o034"/>
+          <p:cNvSpPr txBox="1"/>
+          <p:nvPr/>
+        </p:nvSpPr>
+        <p:spPr>
+          <a:xfrm>
+            <a:off x="1331056" y="3557893"/>
+            <a:ext cx="2011680" cy="223900"/>
+          </a:xfrm>
+          <a:prstGeom prst="rect">
+            <a:avLst/>
+          </a:prstGeom>
+          <a:noFill/>
+          <a:effectLst/>
+        </p:spPr>
+        <p:txBody>
+          <a:bodyPr wrap="none" lIns="18288" rIns="18288" tIns="18288" bIns="18288" anchor="t">
+            <a:spAutoFit/>
+          </a:bodyPr>
+          <a:lstStyle/>
+          <a:p>
+            <a:pPr algn="l">
+              <a:spcAft>
+                <a:spcPts val="0"/>
+              </a:spcAft>
+            </a:pPr>
+            <a:r>
+              <a:rPr sz="1150" b="0" i="0">
+                <a:solidFill>
+                  <a:srgbClr val="F28BA0"/>
+                </a:solidFill>
+                <a:latin typeface="Arial"/>
+              </a:rPr>
+              <a:t>event time 3 µs</a:t>
+            </a:r>
+          </a:p>
+        </p:txBody>
+      </p:sp>
+      <p:sp>
+        <p:nvSpPr>
+          <p:cNvPr id="37" name="A-E20 text 35" descr="sci-ppt:o035"/>
+          <p:cNvSpPr txBox="1"/>
+          <p:nvPr/>
+        </p:nvSpPr>
+        <p:spPr>
+          <a:xfrm>
+            <a:off x="3281776" y="1676400"/>
+            <a:ext cx="2194560" cy="223900"/>
+          </a:xfrm>
+          <a:prstGeom prst="rect">
+            <a:avLst/>
+          </a:prstGeom>
+          <a:noFill/>
+          <a:effectLst/>
+        </p:spPr>
+        <p:txBody>
+          <a:bodyPr wrap="none" lIns="18288" rIns="18288" tIns="18288" bIns="18288" anchor="t">
+            <a:spAutoFit/>
+          </a:bodyPr>
+          <a:lstStyle/>
+          <a:p>
+            <a:pPr algn="l">
+              <a:spcAft>
+                <a:spcPts val="0"/>
+              </a:spcAft>
+            </a:pPr>
+            <a:r>
+              <a:rPr sz="1150" b="0" i="0">
+                <a:solidFill>
+                  <a:srgbClr val="B4C7D2"/>
+                </a:solidFill>
+                <a:latin typeface="Arial"/>
+              </a:rPr>
+              <a:t>slope 2: t ∝ L_g²</a:t>
+            </a:r>
+          </a:p>
+        </p:txBody>
+      </p:sp>
+      <p:sp>
+        <p:nvSpPr>
+          <p:cNvPr id="38" name="A-E20 round_rect 36" descr="sci-ppt:o036"/>
+          <p:cNvSpPr/>
+          <p:nvPr/>
+        </p:nvSpPr>
+        <p:spPr>
+          <a:xfrm>
+            <a:off x="7040880" y="1371600"/>
+            <a:ext cx="4800600" cy="3657600"/>
+          </a:xfrm>
+          <a:prstGeom prst="roundRect">
+            <a:avLst/>
+          </a:prstGeom>
+          <a:solidFill>
+            <a:srgbClr val="213E4B"/>
+          </a:solidFill>
+          <a:ln w="20320">
+            <a:solidFill>
+              <a:srgbClr val="8EDBD4"/>
+            </a:solidFill>
+          </a:ln>
+          <a:effectLst/>
+        </p:spPr>
+        <p:txBody>
+          <a:bodyPr rtlCol="0" anchor="ctr"/>
+          <a:lstStyle/>
+          <a:p>
+            <a:pPr algn="ctr"/>
+          </a:p>
+        </p:txBody>
+      </p:sp>
+      <p:sp>
+        <p:nvSpPr>
+          <p:cNvPr id="39" name="A-E20 text 37" descr="sci-ppt:o037"/>
+          <p:cNvSpPr txBox="1"/>
+          <p:nvPr/>
+        </p:nvSpPr>
+        <p:spPr>
+          <a:xfrm>
+            <a:off x="7150608" y="1426464"/>
+            <a:ext cx="4581144" cy="254889"/>
+          </a:xfrm>
+          <a:prstGeom prst="rect">
+            <a:avLst/>
+          </a:prstGeom>
+          <a:noFill/>
+          <a:effectLst/>
+        </p:spPr>
+        <p:txBody>
+          <a:bodyPr wrap="none" lIns="18288" rIns="18288" tIns="18288" bIns="18288" anchor="t">
+            <a:spAutoFit/>
+          </a:bodyPr>
+          <a:lstStyle/>
+          <a:p>
+            <a:pPr algn="l">
+              <a:spcAft>
+                <a:spcPts val="0"/>
+              </a:spcAft>
+            </a:pPr>
+            <a:r>
+              <a:rPr sz="1350" b="1" i="0">
+                <a:solidFill>
+                  <a:srgbClr val="8EDBD4"/>
+                </a:solidFill>
+                <a:latin typeface="Arial"/>
+              </a:rPr>
+              <a:t>Darcy flow and diffusion</a:t>
+            </a:r>
+          </a:p>
+        </p:txBody>
+      </p:sp>
+      <p:sp>
+        <p:nvSpPr>
+          <p:cNvPr id="40" name="A-E20 text 38" descr="sci-ppt:o038"/>
+          <p:cNvSpPr txBox="1"/>
+          <p:nvPr/>
+        </p:nvSpPr>
+        <p:spPr>
+          <a:xfrm>
+            <a:off x="7178040" y="1828800"/>
+            <a:ext cx="4572000" cy="239395"/>
+          </a:xfrm>
+          <a:prstGeom prst="rect">
+            <a:avLst/>
+          </a:prstGeom>
+          <a:noFill/>
+          <a:effectLst/>
+        </p:spPr>
+        <p:txBody>
+          <a:bodyPr wrap="none" lIns="18288" rIns="18288" tIns="18288" bIns="18288" anchor="t">
+            <a:spAutoFit/>
+          </a:bodyPr>
+          <a:lstStyle/>
+          <a:p>
+            <a:pPr algn="l">
+              <a:spcAft>
+                <a:spcPts val="0"/>
+              </a:spcAft>
+            </a:pPr>
+            <a:r>
+              <a:rPr sz="1250" b="1" i="0">
                 <a:solidFill>
                   <a:srgbClr val="E7F0F3"/>
                 </a:solidFill>
                 <a:latin typeface="Arial"/>
               </a:rPr>
-              <a:t>jl →</a:t>
-            </a:r>
-          </a:p>
-        </p:txBody>
-      </p:sp>
-      <p:cxnSp>
-        <p:nvCxnSpPr>
-          <p:cNvPr id="25" name="arrow 23" descr="sci-ppt:obj-023"/>
-          <p:cNvCxnSpPr/>
-          <p:nvPr/>
-        </p:nvCxnSpPr>
-        <p:spPr>
-          <a:xfrm flipH="1">
-            <a:off x="1965960" y="2651760"/>
-            <a:ext cx="2697480" cy="0"/>
-          </a:xfrm>
-          <a:prstGeom prst="line">
-            <a:avLst/>
-          </a:prstGeom>
-          <a:ln w="21590">
-            <a:solidFill>
-              <a:srgbClr val="8EDBD4"/>
-            </a:solidFill>
-            <a:headEnd type="none" w="med" len="med"/>
-            <a:tailEnd type="triangle" w="med" len="med"/>
-          </a:ln>
-          <a:effectLst/>
-        </p:spPr>
-      </p:cxnSp>
-      <p:sp>
-        <p:nvSpPr>
-          <p:cNvPr id="26" name="text 24" descr="sci-ppt:obj-024"/>
+              <a:t>jₗ = −(k/μₗ) ∇pₚₒᵣₑ</a:t>
+            </a:r>
+          </a:p>
+        </p:txBody>
+      </p:sp>
+      <p:sp>
+        <p:nvSpPr>
+          <p:cNvPr id="41" name="A-E20 text 39" descr="sci-ppt:o039"/>
           <p:cNvSpPr txBox="1"/>
           <p:nvPr/>
         </p:nvSpPr>
         <p:spPr>
           <a:xfrm>
-            <a:off x="5120640" y="2532888"/>
-            <a:ext cx="2926080" cy="310896"/>
+            <a:off x="7178040" y="2286000"/>
+            <a:ext cx="4572000" cy="231648"/>
           </a:xfrm>
           <a:prstGeom prst="rect">
             <a:avLst/>
@@ -3704,7 +4585,7 @@
           <a:effectLst/>
         </p:spPr>
         <p:txBody>
-          <a:bodyPr wrap="none" lIns="0" rIns="0" tIns="0" bIns="0" anchor="ctr">
+          <a:bodyPr wrap="none" lIns="18288" rIns="18288" tIns="18288" bIns="18288" anchor="t">
             <a:spAutoFit/>
           </a:bodyPr>
           <a:lstStyle/>
@@ -3715,27 +4596,179 @@
               </a:spcAft>
             </a:pPr>
             <a:r>
-              <a:rPr sz="1296" b="0" i="0">
+              <a:rPr sz="1200" b="1" i="0">
+                <a:solidFill>
+                  <a:srgbClr val="F2B880"/>
+                </a:solidFill>
+                <a:latin typeface="Arial"/>
+              </a:rPr>
+              <a:t>∂p/∂t = Dₚₒᵣₒ ∇²p,   Dₚₒᵣₒ = k M_d / μₗ</a:t>
+            </a:r>
+          </a:p>
+        </p:txBody>
+      </p:sp>
+      <p:sp>
+        <p:nvSpPr>
+          <p:cNvPr id="42" name="A-E20 text 40" descr="sci-ppt:o040"/>
+          <p:cNvSpPr txBox="1"/>
+          <p:nvPr/>
+        </p:nvSpPr>
+        <p:spPr>
+          <a:xfrm>
+            <a:off x="7178040" y="2788920"/>
+            <a:ext cx="4572000" cy="231648"/>
+          </a:xfrm>
+          <a:prstGeom prst="rect">
+            <a:avLst/>
+          </a:prstGeom>
+          <a:noFill/>
+          <a:effectLst/>
+        </p:spPr>
+        <p:txBody>
+          <a:bodyPr wrap="none" lIns="18288" rIns="18288" tIns="18288" bIns="18288" anchor="t">
+            <a:spAutoFit/>
+          </a:bodyPr>
+          <a:lstStyle/>
+          <a:p>
+            <a:pPr algn="l">
+              <a:spcAft>
+                <a:spcPts val="0"/>
+              </a:spcAft>
+            </a:pPr>
+            <a:r>
+              <a:rPr sz="1200" b="1" i="0">
+                <a:solidFill>
+                  <a:srgbClr val="F2B880"/>
+                </a:solidFill>
+                <a:latin typeface="Arial"/>
+              </a:rPr>
+              <a:t>tₚₒᵣₒ ~ L_g² / Dₚₒᵣₒ = μₗ L_g² / (k M_d)</a:t>
+            </a:r>
+          </a:p>
+        </p:txBody>
+      </p:sp>
+      <p:sp>
+        <p:nvSpPr>
+          <p:cNvPr id="43" name="A-E20 text 41" descr="sci-ppt:o041"/>
+          <p:cNvSpPr txBox="1"/>
+          <p:nvPr/>
+        </p:nvSpPr>
+        <p:spPr>
+          <a:xfrm>
+            <a:off x="7178040" y="3337560"/>
+            <a:ext cx="4572000" cy="402081"/>
+          </a:xfrm>
+          <a:prstGeom prst="rect">
+            <a:avLst/>
+          </a:prstGeom>
+          <a:noFill/>
+          <a:effectLst/>
+        </p:spPr>
+        <p:txBody>
+          <a:bodyPr wrap="none" lIns="18288" rIns="18288" tIns="18288" bIns="18288" anchor="t">
+            <a:spAutoFit/>
+          </a:bodyPr>
+          <a:lstStyle/>
+          <a:p>
+            <a:pPr algn="l">
+              <a:spcAft>
+                <a:spcPts val="0"/>
+              </a:spcAft>
+            </a:pPr>
+            <a:r>
+              <a:rPr sz="1150" b="0" i="0">
+                <a:solidFill>
+                  <a:srgbClr val="B4C7D2"/>
+                </a:solidFill>
+                <a:latin typeface="Arial"/>
+              </a:rPr>
+              <a:t>k = 10⁻¹⁷ m², M_d = 60 kPa, μₗ = 1 mPa s (prescribed</a:t>
+            </a:r>
+          </a:p>
+          <a:p>
+            <a:pPr algn="l">
+              <a:spcAft>
+                <a:spcPts val="0"/>
+              </a:spcAft>
+            </a:pPr>
+            <a:r>
+              <a:rPr sz="1150" b="0" i="0">
+                <a:solidFill>
+                  <a:srgbClr val="B4C7D2"/>
+                </a:solidFill>
+                <a:latin typeface="Arial"/>
+              </a:rPr>
+              <a:t>teaching values).</a:t>
+            </a:r>
+          </a:p>
+        </p:txBody>
+      </p:sp>
+      <p:sp>
+        <p:nvSpPr>
+          <p:cNvPr id="44" name="A-E20 text 42" descr="sci-ppt:o042"/>
+          <p:cNvSpPr txBox="1"/>
+          <p:nvPr/>
+        </p:nvSpPr>
+        <p:spPr>
+          <a:xfrm>
+            <a:off x="7178040" y="3977639"/>
+            <a:ext cx="4572000" cy="402081"/>
+          </a:xfrm>
+          <a:prstGeom prst="rect">
+            <a:avLst/>
+          </a:prstGeom>
+          <a:noFill/>
+          <a:effectLst/>
+        </p:spPr>
+        <p:txBody>
+          <a:bodyPr wrap="none" lIns="18288" rIns="18288" tIns="18288" bIns="18288" anchor="t">
+            <a:spAutoFit/>
+          </a:bodyPr>
+          <a:lstStyle/>
+          <a:p>
+            <a:pPr algn="l">
+              <a:spcAft>
+                <a:spcPts val="0"/>
+              </a:spcAft>
+            </a:pPr>
+            <a:r>
+              <a:rPr sz="1150" b="0" i="0">
                 <a:solidFill>
                   <a:srgbClr val="E7F0F3"/>
                 </a:solidFill>
                 <a:latin typeface="Arial"/>
               </a:rPr>
-              <a:t>∇ppore ←</a:t>
-            </a:r>
-          </a:p>
-        </p:txBody>
-      </p:sp>
-      <p:sp>
-        <p:nvSpPr>
-          <p:cNvPr id="27" name="text 25" descr="sci-ppt:obj-025"/>
+              <a:t>A 3 µs event is approximately undrained at 30 µm; local</a:t>
+            </a:r>
+          </a:p>
+          <a:p>
+            <a:pPr algn="l">
+              <a:spcAft>
+                <a:spcPts val="0"/>
+              </a:spcAft>
+            </a:pPr>
+            <a:r>
+              <a:rPr sz="1150" b="0" i="0">
+                <a:solidFill>
+                  <a:srgbClr val="E7F0F3"/>
+                </a:solidFill>
+                <a:latin typeface="Arial"/>
+              </a:rPr>
+              <a:t>solvent motion remains possible.</a:t>
+            </a:r>
+          </a:p>
+        </p:txBody>
+      </p:sp>
+      <p:sp>
+        <p:nvSpPr>
+          <p:cNvPr id="45" name="A-E20 text 43" descr="sci-ppt:o043"/>
           <p:cNvSpPr txBox="1"/>
           <p:nvPr/>
         </p:nvSpPr>
         <p:spPr>
           <a:xfrm>
-            <a:off x="1426464" y="2862072"/>
-            <a:ext cx="6766560" cy="310896"/>
+            <a:off x="914400" y="5733288"/>
+            <a:ext cx="10972800" cy="239395"/>
           </a:xfrm>
           <a:prstGeom prst="rect">
             <a:avLst/>
@@ -3744,7 +4777,7 @@
           <a:effectLst/>
         </p:spPr>
         <p:txBody>
-          <a:bodyPr wrap="none" lIns="0" rIns="0" tIns="0" bIns="0" anchor="ctr">
+          <a:bodyPr wrap="none" lIns="18288" rIns="18288" tIns="18288" bIns="18288" anchor="t">
             <a:spAutoFit/>
           </a:bodyPr>
           <a:lstStyle/>
@@ -3755,27 +4788,27 @@
               </a:spcAft>
             </a:pPr>
             <a:r>
-              <a:rPr sz="1296" b="0" i="0">
+              <a:rPr sz="1250" b="0" i="0">
                 <a:solidFill>
                   <a:srgbClr val="E7F0F3"/>
                 </a:solidFill>
                 <a:latin typeface="Arial"/>
               </a:rPr>
-              <a:t>Lg , kperm , μl , Md ; tporo</a:t>
-            </a:r>
-          </a:p>
-        </p:txBody>
-      </p:sp>
-      <p:sp>
-        <p:nvSpPr>
-          <p:cNvPr id="28" name="text 26" descr="sci-ppt:obj-026"/>
+              <a:t>Permeability and modulus are inputs from characterisation; only the quadratic scaling with length is a result of the model.</a:t>
+            </a:r>
+          </a:p>
+        </p:txBody>
+      </p:sp>
+      <p:sp>
+        <p:nvSpPr>
+          <p:cNvPr id="46" name="A-E20 text 44" descr="sci-ppt:o044"/>
           <p:cNvSpPr txBox="1"/>
           <p:nvPr/>
         </p:nvSpPr>
         <p:spPr>
           <a:xfrm>
-            <a:off x="256032" y="3465576"/>
-            <a:ext cx="7315200" cy="310896"/>
+            <a:off x="320040" y="6510528"/>
+            <a:ext cx="11521440" cy="200660"/>
           </a:xfrm>
           <a:prstGeom prst="rect">
             <a:avLst/>
@@ -3784,7 +4817,7 @@
           <a:effectLst/>
         </p:spPr>
         <p:txBody>
-          <a:bodyPr wrap="none" lIns="0" rIns="0" tIns="0" bIns="0" anchor="ctr">
+          <a:bodyPr wrap="none" lIns="18288" rIns="18288" tIns="18288" bIns="18288" anchor="t">
             <a:spAutoFit/>
           </a:bodyPr>
           <a:lstStyle/>
@@ -3795,333 +4828,13 @@
               </a:spcAft>
             </a:pPr>
             <a:r>
-              <a:rPr sz="1296" b="0" i="0">
+              <a:rPr sz="1000" b="0" i="0">
                 <a:solidFill>
-                  <a:srgbClr val="8EDBD4"/>
+                  <a:srgbClr val="B4C7D2"/>
                 </a:solidFill>
                 <a:latin typeface="Arial"/>
               </a:rPr>
-              <a:t>Variables and physical limits</a:t>
-            </a:r>
-          </a:p>
-        </p:txBody>
-      </p:sp>
-      <p:sp>
-        <p:nvSpPr>
-          <p:cNvPr id="29" name="text 27" descr="sci-ppt:obj-027"/>
-          <p:cNvSpPr txBox="1"/>
-          <p:nvPr/>
-        </p:nvSpPr>
-        <p:spPr>
-          <a:xfrm>
-            <a:off x="365760" y="3813048"/>
-            <a:ext cx="8412480" cy="310896"/>
-          </a:xfrm>
-          <a:prstGeom prst="rect">
-            <a:avLst/>
-          </a:prstGeom>
-          <a:noFill/>
-          <a:effectLst/>
-        </p:spPr>
-        <p:txBody>
-          <a:bodyPr wrap="none" lIns="0" rIns="0" tIns="0" bIns="0" anchor="ctr">
-            <a:spAutoFit/>
-          </a:bodyPr>
-          <a:lstStyle/>
-          <a:p>
-            <a:pPr algn="l">
-              <a:spcAft>
-                <a:spcPts val="0"/>
-              </a:spcAft>
-            </a:pPr>
-            <a:r>
-              <a:rPr sz="1152" b="0" i="0">
-                <a:solidFill>
-                  <a:srgbClr val="E7F0F3"/>
-                </a:solidFill>
-                <a:latin typeface="Arial"/>
-              </a:rPr>
-              <a:t>• ppore: solvent pressure</a:t>
-            </a:r>
-          </a:p>
-        </p:txBody>
-      </p:sp>
-      <p:sp>
-        <p:nvSpPr>
-          <p:cNvPr id="30" name="text 28" descr="sci-ppt:obj-028"/>
-          <p:cNvSpPr txBox="1"/>
-          <p:nvPr/>
-        </p:nvSpPr>
-        <p:spPr>
-          <a:xfrm>
-            <a:off x="365760" y="4023360"/>
-            <a:ext cx="8412480" cy="310896"/>
-          </a:xfrm>
-          <a:prstGeom prst="rect">
-            <a:avLst/>
-          </a:prstGeom>
-          <a:noFill/>
-          <a:effectLst/>
-        </p:spPr>
-        <p:txBody>
-          <a:bodyPr wrap="none" lIns="0" rIns="0" tIns="0" bIns="0" anchor="ctr">
-            <a:spAutoFit/>
-          </a:bodyPr>
-          <a:lstStyle/>
-          <a:p>
-            <a:pPr algn="l">
-              <a:spcAft>
-                <a:spcPts val="0"/>
-              </a:spcAft>
-            </a:pPr>
-            <a:r>
-              <a:rPr sz="1152" b="0" i="0">
-                <a:solidFill>
-                  <a:srgbClr val="E7F0F3"/>
-                </a:solidFill>
-                <a:latin typeface="Arial"/>
-              </a:rPr>
-              <a:t>• jl: solvent relative to network</a:t>
-            </a:r>
-          </a:p>
-        </p:txBody>
-      </p:sp>
-      <p:sp>
-        <p:nvSpPr>
-          <p:cNvPr id="31" name="text 29" descr="sci-ppt:obj-029"/>
-          <p:cNvSpPr txBox="1"/>
-          <p:nvPr/>
-        </p:nvSpPr>
-        <p:spPr>
-          <a:xfrm>
-            <a:off x="365760" y="4233672"/>
-            <a:ext cx="8412480" cy="310896"/>
-          </a:xfrm>
-          <a:prstGeom prst="rect">
-            <a:avLst/>
-          </a:prstGeom>
-          <a:noFill/>
-          <a:effectLst/>
-        </p:spPr>
-        <p:txBody>
-          <a:bodyPr wrap="none" lIns="0" rIns="0" tIns="0" bIns="0" anchor="ctr">
-            <a:spAutoFit/>
-          </a:bodyPr>
-          <a:lstStyle/>
-          <a:p>
-            <a:pPr algn="l">
-              <a:spcAft>
-                <a:spcPts val="0"/>
-              </a:spcAft>
-            </a:pPr>
-            <a:r>
-              <a:rPr sz="1152" b="0" i="0">
-                <a:solidFill>
-                  <a:srgbClr val="E7F0F3"/>
-                </a:solidFill>
-                <a:latin typeface="Arial"/>
-              </a:rPr>
-              <a:t>• kperm: network permeability</a:t>
-            </a:r>
-          </a:p>
-        </p:txBody>
-      </p:sp>
-      <p:sp>
-        <p:nvSpPr>
-          <p:cNvPr id="32" name="text 30" descr="sci-ppt:obj-030"/>
-          <p:cNvSpPr txBox="1"/>
-          <p:nvPr/>
-        </p:nvSpPr>
-        <p:spPr>
-          <a:xfrm>
-            <a:off x="365760" y="4443984"/>
-            <a:ext cx="8412480" cy="310896"/>
-          </a:xfrm>
-          <a:prstGeom prst="rect">
-            <a:avLst/>
-          </a:prstGeom>
-          <a:noFill/>
-          <a:effectLst/>
-        </p:spPr>
-        <p:txBody>
-          <a:bodyPr wrap="none" lIns="0" rIns="0" tIns="0" bIns="0" anchor="ctr">
-            <a:spAutoFit/>
-          </a:bodyPr>
-          <a:lstStyle/>
-          <a:p>
-            <a:pPr algn="l">
-              <a:spcAft>
-                <a:spcPts val="0"/>
-              </a:spcAft>
-            </a:pPr>
-            <a:r>
-              <a:rPr sz="1152" b="0" i="0">
-                <a:solidFill>
-                  <a:srgbClr val="E7F0F3"/>
-                </a:solidFill>
-                <a:latin typeface="Arial"/>
-              </a:rPr>
-              <a:t>• μl: solvent resistance</a:t>
-            </a:r>
-          </a:p>
-        </p:txBody>
-      </p:sp>
-      <p:sp>
-        <p:nvSpPr>
-          <p:cNvPr id="33" name="text 31" descr="sci-ppt:obj-031"/>
-          <p:cNvSpPr txBox="1"/>
-          <p:nvPr/>
-        </p:nvSpPr>
-        <p:spPr>
-          <a:xfrm>
-            <a:off x="365760" y="4654296"/>
-            <a:ext cx="8412480" cy="310896"/>
-          </a:xfrm>
-          <a:prstGeom prst="rect">
-            <a:avLst/>
-          </a:prstGeom>
-          <a:noFill/>
-          <a:effectLst/>
-        </p:spPr>
-        <p:txBody>
-          <a:bodyPr wrap="none" lIns="0" rIns="0" tIns="0" bIns="0" anchor="ctr">
-            <a:spAutoFit/>
-          </a:bodyPr>
-          <a:lstStyle/>
-          <a:p>
-            <a:pPr algn="l">
-              <a:spcAft>
-                <a:spcPts val="0"/>
-              </a:spcAft>
-            </a:pPr>
-            <a:r>
-              <a:rPr sz="1152" b="0" i="0">
-                <a:solidFill>
-                  <a:srgbClr val="E7F0F3"/>
-                </a:solidFill>
-                <a:latin typeface="Arial"/>
-              </a:rPr>
-              <a:t>• Md: storage modulus</a:t>
-            </a:r>
-          </a:p>
-        </p:txBody>
-      </p:sp>
-      <p:sp>
-        <p:nvSpPr>
-          <p:cNvPr id="34" name="text 32" descr="sci-ppt:obj-032"/>
-          <p:cNvSpPr txBox="1"/>
-          <p:nvPr/>
-        </p:nvSpPr>
-        <p:spPr>
-          <a:xfrm>
-            <a:off x="365760" y="4864608"/>
-            <a:ext cx="8412480" cy="310896"/>
-          </a:xfrm>
-          <a:prstGeom prst="rect">
-            <a:avLst/>
-          </a:prstGeom>
-          <a:noFill/>
-          <a:effectLst/>
-        </p:spPr>
-        <p:txBody>
-          <a:bodyPr wrap="none" lIns="0" rIns="0" tIns="0" bIns="0" anchor="ctr">
-            <a:spAutoFit/>
-          </a:bodyPr>
-          <a:lstStyle/>
-          <a:p>
-            <a:pPr algn="l">
-              <a:spcAft>
-                <a:spcPts val="0"/>
-              </a:spcAft>
-            </a:pPr>
-            <a:r>
-              <a:rPr sz="1152" b="0" i="0">
-                <a:solidFill>
-                  <a:srgbClr val="E7F0F3"/>
-                </a:solidFill>
-                <a:latin typeface="Arial"/>
-              </a:rPr>
-              <a:t>• Lg, tporo, Dporo, t</a:t>
-            </a:r>
-          </a:p>
-        </p:txBody>
-      </p:sp>
-      <p:sp>
-        <p:nvSpPr>
-          <p:cNvPr id="35" name="text 33" descr="sci-ppt:obj-033"/>
-          <p:cNvSpPr txBox="1"/>
-          <p:nvPr/>
-        </p:nvSpPr>
-        <p:spPr>
-          <a:xfrm>
-            <a:off x="365760" y="5074920"/>
-            <a:ext cx="8412480" cy="310896"/>
-          </a:xfrm>
-          <a:prstGeom prst="rect">
-            <a:avLst/>
-          </a:prstGeom>
-          <a:noFill/>
-          <a:effectLst/>
-        </p:spPr>
-        <p:txBody>
-          <a:bodyPr wrap="none" lIns="0" rIns="0" tIns="0" bIns="0" anchor="ctr">
-            <a:spAutoFit/>
-          </a:bodyPr>
-          <a:lstStyle/>
-          <a:p>
-            <a:pPr algn="l">
-              <a:spcAft>
-                <a:spcPts val="0"/>
-              </a:spcAft>
-            </a:pPr>
-            <a:r>
-              <a:rPr sz="1152" b="0" i="0">
-                <a:solidFill>
-                  <a:srgbClr val="E7F0F3"/>
-                </a:solidFill>
-                <a:latin typeface="Arial"/>
-              </a:rPr>
-              <a:t>Drainage redistributes solvent over Lg</a:t>
-            </a:r>
-          </a:p>
-        </p:txBody>
-      </p:sp>
-      <p:sp>
-        <p:nvSpPr>
-          <p:cNvPr id="36" name="text 34" descr="sci-ppt:obj-034"/>
-          <p:cNvSpPr txBox="1"/>
-          <p:nvPr/>
-        </p:nvSpPr>
-        <p:spPr>
-          <a:xfrm>
-            <a:off x="365760" y="5285232"/>
-            <a:ext cx="8412480" cy="310896"/>
-          </a:xfrm>
-          <a:prstGeom prst="rect">
-            <a:avLst/>
-          </a:prstGeom>
-          <a:noFill/>
-          <a:effectLst/>
-        </p:spPr>
-        <p:txBody>
-          <a:bodyPr wrap="none" lIns="0" rIns="0" tIns="0" bIns="0" anchor="ctr">
-            <a:spAutoFit/>
-          </a:bodyPr>
-          <a:lstStyle/>
-          <a:p>
-            <a:pPr algn="l">
-              <a:spcAft>
-                <a:spcPts val="0"/>
-              </a:spcAft>
-            </a:pPr>
-            <a:r>
-              <a:rPr sz="1152" b="0" i="0">
-                <a:solidFill>
-                  <a:srgbClr val="E7F0F3"/>
-                </a:solidFill>
-                <a:latin typeface="Arial"/>
-              </a:rPr>
-              <a:t>Small perturbation and constant-coefficient assumptions are separate</a:t>
+              <a:t>Darcy/storage drainage time of Eq. A-E20.</a:t>
             </a:r>
           </a:p>
         </p:txBody>
